--- a/Growth Report/Catalyst_Growth_Report.pptx
+++ b/Growth Report/Catalyst_Growth_Report.pptx
@@ -3568,7 +3568,7 @@
                 </a:solidFill>
                 <a:latin typeface="Futura"/>
               </a:rPr>
-              <a:t>Linear weekly growth:  +190 units/week   •   +0.053 U/S/W per week   (Wk 1: 835 u / 0.238  →  Wk 24: 6,801 u / 1.893)</a:t>
+              <a:t>Linear weekly growth:  +202 units/week   •   +0.056 U/S/W per week   (Wk 1: 835 u / 0.238  →  Wk 25: 7,585 u / 2.107)</a:t>
             </a:r>
           </a:p>
         </p:txBody>
